--- a/docs/analyses/swanzey-financial-review/Deliverables/Board Presentation.pptx
+++ b/docs/analyses/swanzey-financial-review/Deliverables/Board Presentation.pptx
@@ -16,6 +16,9 @@
     <p:sldId id="264" r:id="rId15"/>
     <p:sldId id="265" r:id="rId16"/>
     <p:sldId id="266" r:id="rId17"/>
+    <p:sldId id="267" r:id="rId18"/>
+    <p:sldId id="268" r:id="rId19"/>
+    <p:sldId id="269" r:id="rId20"/>
   </p:sldIdLst>
   <p:sldSz cx="12191695" cy="6858000" type="screen4x3"/>
   <p:notesSz cx="6858000" cy="9144000"/>
@@ -3276,7 +3279,7 @@
             <a:avLst/>
           </a:prstGeom>
           <a:solidFill>
-            <a:srgbClr val="1F3A5F"/>
+            <a:srgbClr val="FFFFFF"/>
           </a:solidFill>
           <a:ln>
             <a:noFill/>
@@ -3330,10 +3333,10 @@
             <a:r>
               <a:rPr sz="2800" b="1" i="0">
                 <a:solidFill>
-                  <a:srgbClr val="FFFFFF"/>
-                </a:solidFill>
-              </a:rPr>
-              <a:t>Recommendations (sequenced)</a:t>
+                  <a:srgbClr val="1F3A5F"/>
+                </a:solidFill>
+              </a:rPr>
+              <a:t>The fix: restructure the money</a:t>
             </a:r>
           </a:p>
         </p:txBody>
@@ -3346,8 +3349,8 @@
         </p:nvSpPr>
         <p:spPr>
           <a:xfrm>
-            <a:off x="731520" y="1554480"/>
-            <a:ext cx="10698480" cy="4572000"/>
+            <a:off x="731520" y="1371600"/>
+            <a:ext cx="10698480" cy="822960"/>
           </a:xfrm>
           <a:prstGeom prst="rect">
             <a:avLst/>
@@ -3360,164 +3363,129 @@
           </a:bodyPr>
           <a:lstStyle/>
           <a:p>
+            <a:pPr algn="l"/>
+            <a:r>
+              <a:rPr sz="1800" b="0" i="0">
+                <a:solidFill>
+                  <a:srgbClr val="5F5E5A"/>
+                </a:solidFill>
+              </a:rPr>
+              <a:t>Don't re-argue the failed bond — change how it's paid for.</a:t>
+            </a:r>
+          </a:p>
+        </p:txBody>
+      </p:sp>
+      <p:sp>
+        <p:nvSpPr>
+          <p:cNvPr id="5" name="TextBox 4"/>
+          <p:cNvSpPr txBox="1"/>
+          <p:nvPr/>
+        </p:nvSpPr>
+        <p:spPr>
+          <a:xfrm>
+            <a:off x="731520" y="2468880"/>
+            <a:ext cx="10698480" cy="3657600"/>
+          </a:xfrm>
+          <a:prstGeom prst="rect">
+            <a:avLst/>
+          </a:prstGeom>
+          <a:noFill/>
+        </p:spPr>
+        <p:txBody>
+          <a:bodyPr wrap="square">
+            <a:spAutoFit/>
+          </a:bodyPr>
+          <a:lstStyle/>
+          <a:p>
             <a:pPr>
               <a:spcAft>
-                <a:spcPts val="900"/>
+                <a:spcPts val="800"/>
               </a:spcAft>
             </a:pPr>
             <a:r>
               <a:rPr b="1" sz="1800">
                 <a:solidFill>
-                  <a:srgbClr val="FFFFFF"/>
-                </a:solidFill>
-              </a:rPr>
-              <a:t>R1 Stabilize the administrator </a:t>
+                  <a:srgbClr val="1F3A5F"/>
+                </a:solidFill>
+              </a:rPr>
+              <a:t>•  Make others pay first — </a:t>
             </a:r>
             <a:r>
               <a:rPr sz="1800">
                 <a:solidFill>
-                  <a:srgbClr val="CFDAE6"/>
-                </a:solidFill>
-              </a:rPr>
-              <a:t>— multi-year contract, clear lanes (do first)</a:t>
+                  <a:srgbClr val="5F5E5A"/>
+                </a:solidFill>
+              </a:rPr>
+              <a:t>80% bridge aid (RSA 234); water via DWSRF rates + principal forgiveness; grants for ADA/roads</a:t>
             </a:r>
           </a:p>
           <a:p>
             <a:pPr>
               <a:spcAft>
-                <a:spcPts val="900"/>
+                <a:spcPts val="800"/>
               </a:spcAft>
             </a:pPr>
             <a:r>
               <a:rPr b="1" sz="1800">
                 <a:solidFill>
-                  <a:srgbClr val="FFFFFF"/>
-                </a:solidFill>
-              </a:rPr>
-              <a:t>R2 Reserve + state-aid + SRF capital </a:t>
+                  <a:srgbClr val="1F3A5F"/>
+                </a:solidFill>
+              </a:rPr>
+              <a:t>•  Save, don't borrow — </a:t>
             </a:r>
             <a:r>
               <a:rPr sz="1800">
                 <a:solidFill>
-                  <a:srgbClr val="CFDAE6"/>
-                </a:solidFill>
-              </a:rPr>
-              <a:t>— stop losing 3/5 bond votes</a:t>
+                  <a:srgbClr val="5F5E5A"/>
+                </a:solidFill>
+              </a:rPr>
+              <a:t>capital reserves need a simple majority, not 3/5; build the facility pay-go by 2031</a:t>
             </a:r>
           </a:p>
           <a:p>
             <a:pPr>
               <a:spcAft>
-                <a:spcPts val="900"/>
+                <a:spcPts val="800"/>
               </a:spcAft>
             </a:pPr>
             <a:r>
               <a:rPr b="1" sz="1800">
                 <a:solidFill>
-                  <a:srgbClr val="FFFFFF"/>
-                </a:solidFill>
-              </a:rPr>
-              <a:t>R3 Tell the truth on revaluation &amp; budget </a:t>
+                  <a:srgbClr val="1F3A5F"/>
+                </a:solidFill>
+              </a:rPr>
+              <a:t>•  Smooth it out — </a:t>
             </a:r>
             <a:r>
               <a:rPr sz="1800">
                 <a:solidFill>
-                  <a:srgbClr val="CFDAE6"/>
-                </a:solidFill>
-              </a:rPr>
-              <a:t>— rebuild trust</a:t>
+                  <a:srgbClr val="5F5E5A"/>
+                </a:solidFill>
+              </a:rPr>
+              <a:t>phase deposits so the tax impact peaks small, then drops below today</a:t>
             </a:r>
           </a:p>
           <a:p>
             <a:pPr>
               <a:spcAft>
-                <a:spcPts val="900"/>
+                <a:spcPts val="800"/>
               </a:spcAft>
             </a:pPr>
             <a:r>
               <a:rPr b="1" sz="1800">
                 <a:solidFill>
-                  <a:srgbClr val="FFFFFF"/>
-                </a:solidFill>
-              </a:rPr>
-              <a:t>R4 Publish a 6-year CIP </a:t>
+                  <a:srgbClr val="1F3A5F"/>
+                </a:solidFill>
+              </a:rPr>
+              <a:t>•  Already underway — </a:t>
             </a:r>
             <a:r>
               <a:rPr sz="1800">
                 <a:solidFill>
-                  <a:srgbClr val="CFDAE6"/>
-                </a:solidFill>
-              </a:rPr>
-              <a:t>— surprises become expectations</a:t>
-            </a:r>
-          </a:p>
-          <a:p>
-            <a:pPr>
-              <a:spcAft>
-                <a:spcPts val="900"/>
-              </a:spcAft>
-            </a:pPr>
-            <a:r>
-              <a:rPr b="1" sz="1800">
-                <a:solidFill>
-                  <a:srgbClr val="FFFFFF"/>
-                </a:solidFill>
-              </a:rPr>
-              <a:t>R5 Govern the new 5-member board </a:t>
-            </a:r>
-            <a:r>
-              <a:rPr sz="1800">
-                <a:solidFill>
-                  <a:srgbClr val="CFDAE6"/>
-                </a:solidFill>
-              </a:rPr>
-              <a:t>— norms &amp; onboarding</a:t>
-            </a:r>
-          </a:p>
-          <a:p>
-            <a:pPr>
-              <a:spcAft>
-                <a:spcPts val="900"/>
-              </a:spcAft>
-            </a:pPr>
-            <a:r>
-              <a:rPr b="1" sz="1800">
-                <a:solidFill>
-                  <a:srgbClr val="FFFFFF"/>
-                </a:solidFill>
-              </a:rPr>
-              <a:t>R6 Run water as an enterprise </a:t>
-            </a:r>
-            <a:r>
-              <a:rPr sz="1800">
-                <a:solidFill>
-                  <a:srgbClr val="CFDAE6"/>
-                </a:solidFill>
-              </a:rPr>
-              <a:t>— rate study, DWSRF, asset mgmt</a:t>
-            </a:r>
-          </a:p>
-          <a:p>
-            <a:pPr>
-              <a:spcAft>
-                <a:spcPts val="900"/>
-              </a:spcAft>
-            </a:pPr>
-            <a:r>
-              <a:rPr b="1" sz="1800">
-                <a:solidFill>
-                  <a:srgbClr val="FFFFFF"/>
-                </a:solidFill>
-              </a:rPr>
-              <a:t>R7 De-risk land-use decisions </a:t>
-            </a:r>
-            <a:r>
-              <a:rPr sz="1800">
-                <a:solidFill>
-                  <a:srgbClr val="CFDAE6"/>
-                </a:solidFill>
-              </a:rPr>
-              <a:t>— decide on criteria, with counsel</a:t>
+                  <a:srgbClr val="5F5E5A"/>
+                </a:solidFill>
+              </a:rPr>
+              <a:t>2025 water acquisition + SRF principal-forgiveness study prove the model works</a:t>
             </a:r>
           </a:p>
         </p:txBody>
@@ -3531,6 +3499,591 @@
 </file>
 
 <file path=ppt/slides/slide11.xml><?xml version="1.0" encoding="utf-8"?>
+<p:sld xmlns:a="http://schemas.openxmlformats.org/drawingml/2006/main" xmlns:p="http://schemas.openxmlformats.org/presentationml/2006/main" xmlns:r="http://schemas.openxmlformats.org/officeDocument/2006/relationships">
+  <p:cSld>
+    <p:spTree>
+      <p:nvGrpSpPr>
+        <p:cNvPr id="1" name=""/>
+        <p:cNvGrpSpPr/>
+        <p:nvPr/>
+      </p:nvGrpSpPr>
+      <p:grpSpPr/>
+      <p:sp>
+        <p:nvSpPr>
+          <p:cNvPr id="2" name="Rectangle 1"/>
+          <p:cNvSpPr/>
+          <p:nvPr/>
+        </p:nvSpPr>
+        <p:spPr>
+          <a:xfrm>
+            <a:off x="0" y="0"/>
+            <a:ext cx="12191695" cy="6858000"/>
+          </a:xfrm>
+          <a:prstGeom prst="rect">
+            <a:avLst/>
+          </a:prstGeom>
+          <a:solidFill>
+            <a:srgbClr val="FFFFFF"/>
+          </a:solidFill>
+          <a:ln>
+            <a:noFill/>
+          </a:ln>
+        </p:spPr>
+        <p:style>
+          <a:lnRef idx="1">
+            <a:schemeClr val="accent1"/>
+          </a:lnRef>
+          <a:fillRef idx="3">
+            <a:schemeClr val="accent1"/>
+          </a:fillRef>
+          <a:effectRef idx="2">
+            <a:schemeClr val="accent1"/>
+          </a:effectRef>
+          <a:fontRef idx="minor">
+            <a:schemeClr val="lt1"/>
+          </a:fontRef>
+        </p:style>
+        <p:txBody>
+          <a:bodyPr rtlCol="0" anchor="ctr"/>
+          <a:lstStyle/>
+          <a:p>
+            <a:pPr algn="ctr"/>
+          </a:p>
+        </p:txBody>
+      </p:sp>
+      <p:sp>
+        <p:nvSpPr>
+          <p:cNvPr id="3" name="TextBox 2"/>
+          <p:cNvSpPr txBox="1"/>
+          <p:nvPr/>
+        </p:nvSpPr>
+        <p:spPr>
+          <a:xfrm>
+            <a:off x="731520" y="365760"/>
+            <a:ext cx="10698480" cy="822960"/>
+          </a:xfrm>
+          <a:prstGeom prst="rect">
+            <a:avLst/>
+          </a:prstGeom>
+          <a:noFill/>
+        </p:spPr>
+        <p:txBody>
+          <a:bodyPr wrap="square">
+            <a:spAutoFit/>
+          </a:bodyPr>
+          <a:lstStyle/>
+          <a:p>
+            <a:pPr algn="l"/>
+            <a:r>
+              <a:rPr sz="2800" b="1" i="0">
+                <a:solidFill>
+                  <a:srgbClr val="1F3A5F"/>
+                </a:solidFill>
+              </a:rPr>
+              <a:t>62% is other people's money</a:t>
+            </a:r>
+          </a:p>
+        </p:txBody>
+      </p:sp>
+      <p:pic>
+        <p:nvPicPr>
+          <p:cNvPr id="4" name="Picture 3" descr="06_capital-funding-stack.png"/>
+          <p:cNvPicPr>
+            <a:picLocks noChangeAspect="1"/>
+          </p:cNvPicPr>
+          <p:nvPr/>
+        </p:nvPicPr>
+        <p:blipFill>
+          <a:blip r:embed="rId2"/>
+          <a:stretch>
+            <a:fillRect/>
+          </a:stretch>
+        </p:blipFill>
+        <p:spPr>
+          <a:xfrm>
+            <a:off x="1554480" y="1280160"/>
+            <a:ext cx="9052560" cy="5032064"/>
+          </a:xfrm>
+          <a:prstGeom prst="rect">
+            <a:avLst/>
+          </a:prstGeom>
+        </p:spPr>
+      </p:pic>
+      <p:sp>
+        <p:nvSpPr>
+          <p:cNvPr id="5" name="TextBox 4"/>
+          <p:cNvSpPr txBox="1"/>
+          <p:nvPr/>
+        </p:nvSpPr>
+        <p:spPr>
+          <a:xfrm>
+            <a:off x="731520" y="6126480"/>
+            <a:ext cx="10698480" cy="548640"/>
+          </a:xfrm>
+          <a:prstGeom prst="rect">
+            <a:avLst/>
+          </a:prstGeom>
+          <a:noFill/>
+        </p:spPr>
+        <p:txBody>
+          <a:bodyPr wrap="square">
+            <a:spAutoFit/>
+          </a:bodyPr>
+          <a:lstStyle/>
+          <a:p>
+            <a:pPr algn="l"/>
+            <a:r>
+              <a:rPr sz="1400" b="1" i="0">
+                <a:solidFill>
+                  <a:srgbClr val="993C1D"/>
+                </a:solidFill>
+              </a:rPr>
+              <a:t>$5.3M of needs · $2.0M local · $0 new bonds · 0 supermajority votes.</a:t>
+            </a:r>
+          </a:p>
+        </p:txBody>
+      </p:sp>
+    </p:spTree>
+  </p:cSld>
+  <p:clrMapOvr>
+    <a:masterClrMapping/>
+  </p:clrMapOvr>
+</p:sld>
+</file>
+
+<file path=ppt/slides/slide12.xml><?xml version="1.0" encoding="utf-8"?>
+<p:sld xmlns:a="http://schemas.openxmlformats.org/drawingml/2006/main" xmlns:p="http://schemas.openxmlformats.org/presentationml/2006/main" xmlns:r="http://schemas.openxmlformats.org/officeDocument/2006/relationships">
+  <p:cSld>
+    <p:spTree>
+      <p:nvGrpSpPr>
+        <p:cNvPr id="1" name=""/>
+        <p:cNvGrpSpPr/>
+        <p:nvPr/>
+      </p:nvGrpSpPr>
+      <p:grpSpPr/>
+      <p:sp>
+        <p:nvSpPr>
+          <p:cNvPr id="2" name="Rectangle 1"/>
+          <p:cNvSpPr/>
+          <p:nvPr/>
+        </p:nvSpPr>
+        <p:spPr>
+          <a:xfrm>
+            <a:off x="0" y="0"/>
+            <a:ext cx="12191695" cy="6858000"/>
+          </a:xfrm>
+          <a:prstGeom prst="rect">
+            <a:avLst/>
+          </a:prstGeom>
+          <a:solidFill>
+            <a:srgbClr val="FFFFFF"/>
+          </a:solidFill>
+          <a:ln>
+            <a:noFill/>
+          </a:ln>
+        </p:spPr>
+        <p:style>
+          <a:lnRef idx="1">
+            <a:schemeClr val="accent1"/>
+          </a:lnRef>
+          <a:fillRef idx="3">
+            <a:schemeClr val="accent1"/>
+          </a:fillRef>
+          <a:effectRef idx="2">
+            <a:schemeClr val="accent1"/>
+          </a:effectRef>
+          <a:fontRef idx="minor">
+            <a:schemeClr val="lt1"/>
+          </a:fontRef>
+        </p:style>
+        <p:txBody>
+          <a:bodyPr rtlCol="0" anchor="ctr"/>
+          <a:lstStyle/>
+          <a:p>
+            <a:pPr algn="ctr"/>
+          </a:p>
+        </p:txBody>
+      </p:sp>
+      <p:sp>
+        <p:nvSpPr>
+          <p:cNvPr id="3" name="TextBox 2"/>
+          <p:cNvSpPr txBox="1"/>
+          <p:nvPr/>
+        </p:nvSpPr>
+        <p:spPr>
+          <a:xfrm>
+            <a:off x="731520" y="365760"/>
+            <a:ext cx="10698480" cy="822960"/>
+          </a:xfrm>
+          <a:prstGeom prst="rect">
+            <a:avLst/>
+          </a:prstGeom>
+          <a:noFill/>
+        </p:spPr>
+        <p:txBody>
+          <a:bodyPr wrap="square">
+            <a:spAutoFit/>
+          </a:bodyPr>
+          <a:lstStyle/>
+          <a:p>
+            <a:pPr algn="l"/>
+            <a:r>
+              <a:rPr sz="2800" b="1" i="0">
+                <a:solidFill>
+                  <a:srgbClr val="1F3A5F"/>
+                </a:solidFill>
+              </a:rPr>
+              <a:t>What the fix costs a $300k home</a:t>
+            </a:r>
+          </a:p>
+        </p:txBody>
+      </p:sp>
+      <p:pic>
+        <p:nvPicPr>
+          <p:cNvPr id="4" name="Picture 3" descr="07_capital-tax-glide.png"/>
+          <p:cNvPicPr>
+            <a:picLocks noChangeAspect="1"/>
+          </p:cNvPicPr>
+          <p:nvPr/>
+        </p:nvPicPr>
+        <p:blipFill>
+          <a:blip r:embed="rId2"/>
+          <a:stretch>
+            <a:fillRect/>
+          </a:stretch>
+        </p:blipFill>
+        <p:spPr>
+          <a:xfrm>
+            <a:off x="1554480" y="1371600"/>
+            <a:ext cx="9052560" cy="4832327"/>
+          </a:xfrm>
+          <a:prstGeom prst="rect">
+            <a:avLst/>
+          </a:prstGeom>
+        </p:spPr>
+      </p:pic>
+      <p:sp>
+        <p:nvSpPr>
+          <p:cNvPr id="5" name="TextBox 4"/>
+          <p:cNvSpPr txBox="1"/>
+          <p:nvPr/>
+        </p:nvSpPr>
+        <p:spPr>
+          <a:xfrm>
+            <a:off x="731520" y="6217920"/>
+            <a:ext cx="10698480" cy="457200"/>
+          </a:xfrm>
+          <a:prstGeom prst="rect">
+            <a:avLst/>
+          </a:prstGeom>
+          <a:noFill/>
+        </p:spPr>
+        <p:txBody>
+          <a:bodyPr wrap="square">
+            <a:spAutoFit/>
+          </a:bodyPr>
+          <a:lstStyle/>
+          <a:p>
+            <a:pPr algn="l"/>
+            <a:r>
+              <a:rPr sz="1300" b="1" i="0">
+                <a:solidFill>
+                  <a:srgbClr val="5F5E5A"/>
+                </a:solidFill>
+              </a:rPr>
+              <a:t>Peak ≈ a tank of oil/year — then below today, everything built.</a:t>
+            </a:r>
+          </a:p>
+        </p:txBody>
+      </p:sp>
+    </p:spTree>
+  </p:cSld>
+  <p:clrMapOvr>
+    <a:masterClrMapping/>
+  </p:clrMapOvr>
+</p:sld>
+</file>
+
+<file path=ppt/slides/slide13.xml><?xml version="1.0" encoding="utf-8"?>
+<p:sld xmlns:a="http://schemas.openxmlformats.org/drawingml/2006/main" xmlns:p="http://schemas.openxmlformats.org/presentationml/2006/main" xmlns:r="http://schemas.openxmlformats.org/officeDocument/2006/relationships">
+  <p:cSld>
+    <p:spTree>
+      <p:nvGrpSpPr>
+        <p:cNvPr id="1" name=""/>
+        <p:cNvGrpSpPr/>
+        <p:nvPr/>
+      </p:nvGrpSpPr>
+      <p:grpSpPr/>
+      <p:sp>
+        <p:nvSpPr>
+          <p:cNvPr id="2" name="Rectangle 1"/>
+          <p:cNvSpPr/>
+          <p:nvPr/>
+        </p:nvSpPr>
+        <p:spPr>
+          <a:xfrm>
+            <a:off x="0" y="0"/>
+            <a:ext cx="12191695" cy="6858000"/>
+          </a:xfrm>
+          <a:prstGeom prst="rect">
+            <a:avLst/>
+          </a:prstGeom>
+          <a:solidFill>
+            <a:srgbClr val="1F3A5F"/>
+          </a:solidFill>
+          <a:ln>
+            <a:noFill/>
+          </a:ln>
+        </p:spPr>
+        <p:style>
+          <a:lnRef idx="1">
+            <a:schemeClr val="accent1"/>
+          </a:lnRef>
+          <a:fillRef idx="3">
+            <a:schemeClr val="accent1"/>
+          </a:fillRef>
+          <a:effectRef idx="2">
+            <a:schemeClr val="accent1"/>
+          </a:effectRef>
+          <a:fontRef idx="minor">
+            <a:schemeClr val="lt1"/>
+          </a:fontRef>
+        </p:style>
+        <p:txBody>
+          <a:bodyPr rtlCol="0" anchor="ctr"/>
+          <a:lstStyle/>
+          <a:p>
+            <a:pPr algn="ctr"/>
+          </a:p>
+        </p:txBody>
+      </p:sp>
+      <p:sp>
+        <p:nvSpPr>
+          <p:cNvPr id="3" name="TextBox 2"/>
+          <p:cNvSpPr txBox="1"/>
+          <p:nvPr/>
+        </p:nvSpPr>
+        <p:spPr>
+          <a:xfrm>
+            <a:off x="731520" y="457200"/>
+            <a:ext cx="10698480" cy="914400"/>
+          </a:xfrm>
+          <a:prstGeom prst="rect">
+            <a:avLst/>
+          </a:prstGeom>
+          <a:noFill/>
+        </p:spPr>
+        <p:txBody>
+          <a:bodyPr wrap="square">
+            <a:spAutoFit/>
+          </a:bodyPr>
+          <a:lstStyle/>
+          <a:p>
+            <a:pPr algn="l"/>
+            <a:r>
+              <a:rPr sz="2800" b="1" i="0">
+                <a:solidFill>
+                  <a:srgbClr val="FFFFFF"/>
+                </a:solidFill>
+              </a:rPr>
+              <a:t>Recommendations (sequenced)</a:t>
+            </a:r>
+          </a:p>
+        </p:txBody>
+      </p:sp>
+      <p:sp>
+        <p:nvSpPr>
+          <p:cNvPr id="4" name="TextBox 3"/>
+          <p:cNvSpPr txBox="1"/>
+          <p:nvPr/>
+        </p:nvSpPr>
+        <p:spPr>
+          <a:xfrm>
+            <a:off x="731520" y="1554480"/>
+            <a:ext cx="10698480" cy="4572000"/>
+          </a:xfrm>
+          <a:prstGeom prst="rect">
+            <a:avLst/>
+          </a:prstGeom>
+          <a:noFill/>
+        </p:spPr>
+        <p:txBody>
+          <a:bodyPr wrap="square">
+            <a:spAutoFit/>
+          </a:bodyPr>
+          <a:lstStyle/>
+          <a:p>
+            <a:pPr>
+              <a:spcAft>
+                <a:spcPts val="900"/>
+              </a:spcAft>
+            </a:pPr>
+            <a:r>
+              <a:rPr b="1" sz="1800">
+                <a:solidFill>
+                  <a:srgbClr val="FFFFFF"/>
+                </a:solidFill>
+              </a:rPr>
+              <a:t>R1 Stabilize the administrator </a:t>
+            </a:r>
+            <a:r>
+              <a:rPr sz="1800">
+                <a:solidFill>
+                  <a:srgbClr val="CFDAE6"/>
+                </a:solidFill>
+              </a:rPr>
+              <a:t>— multi-year contract, clear lanes (do first)</a:t>
+            </a:r>
+          </a:p>
+          <a:p>
+            <a:pPr>
+              <a:spcAft>
+                <a:spcPts val="900"/>
+              </a:spcAft>
+            </a:pPr>
+            <a:r>
+              <a:rPr b="1" sz="1800">
+                <a:solidFill>
+                  <a:srgbClr val="FFFFFF"/>
+                </a:solidFill>
+              </a:rPr>
+              <a:t>R2 Reserve + state-aid + SRF capital </a:t>
+            </a:r>
+            <a:r>
+              <a:rPr sz="1800">
+                <a:solidFill>
+                  <a:srgbClr val="CFDAE6"/>
+                </a:solidFill>
+              </a:rPr>
+              <a:t>— stop losing 3/5 bond votes</a:t>
+            </a:r>
+          </a:p>
+          <a:p>
+            <a:pPr>
+              <a:spcAft>
+                <a:spcPts val="900"/>
+              </a:spcAft>
+            </a:pPr>
+            <a:r>
+              <a:rPr b="1" sz="1800">
+                <a:solidFill>
+                  <a:srgbClr val="FFFFFF"/>
+                </a:solidFill>
+              </a:rPr>
+              <a:t>R3 Tell the truth on revaluation &amp; budget </a:t>
+            </a:r>
+            <a:r>
+              <a:rPr sz="1800">
+                <a:solidFill>
+                  <a:srgbClr val="CFDAE6"/>
+                </a:solidFill>
+              </a:rPr>
+              <a:t>— rebuild trust</a:t>
+            </a:r>
+          </a:p>
+          <a:p>
+            <a:pPr>
+              <a:spcAft>
+                <a:spcPts val="900"/>
+              </a:spcAft>
+            </a:pPr>
+            <a:r>
+              <a:rPr b="1" sz="1800">
+                <a:solidFill>
+                  <a:srgbClr val="FFFFFF"/>
+                </a:solidFill>
+              </a:rPr>
+              <a:t>R4 Publish a 6-year CIP </a:t>
+            </a:r>
+            <a:r>
+              <a:rPr sz="1800">
+                <a:solidFill>
+                  <a:srgbClr val="CFDAE6"/>
+                </a:solidFill>
+              </a:rPr>
+              <a:t>— surprises become expectations</a:t>
+            </a:r>
+          </a:p>
+          <a:p>
+            <a:pPr>
+              <a:spcAft>
+                <a:spcPts val="900"/>
+              </a:spcAft>
+            </a:pPr>
+            <a:r>
+              <a:rPr b="1" sz="1800">
+                <a:solidFill>
+                  <a:srgbClr val="FFFFFF"/>
+                </a:solidFill>
+              </a:rPr>
+              <a:t>R5 Govern the new 5-member board </a:t>
+            </a:r>
+            <a:r>
+              <a:rPr sz="1800">
+                <a:solidFill>
+                  <a:srgbClr val="CFDAE6"/>
+                </a:solidFill>
+              </a:rPr>
+              <a:t>— norms &amp; onboarding</a:t>
+            </a:r>
+          </a:p>
+          <a:p>
+            <a:pPr>
+              <a:spcAft>
+                <a:spcPts val="900"/>
+              </a:spcAft>
+            </a:pPr>
+            <a:r>
+              <a:rPr b="1" sz="1800">
+                <a:solidFill>
+                  <a:srgbClr val="FFFFFF"/>
+                </a:solidFill>
+              </a:rPr>
+              <a:t>R6 Run water as an enterprise </a:t>
+            </a:r>
+            <a:r>
+              <a:rPr sz="1800">
+                <a:solidFill>
+                  <a:srgbClr val="CFDAE6"/>
+                </a:solidFill>
+              </a:rPr>
+              <a:t>— rate study, DWSRF, asset mgmt</a:t>
+            </a:r>
+          </a:p>
+          <a:p>
+            <a:pPr>
+              <a:spcAft>
+                <a:spcPts val="900"/>
+              </a:spcAft>
+            </a:pPr>
+            <a:r>
+              <a:rPr b="1" sz="1800">
+                <a:solidFill>
+                  <a:srgbClr val="FFFFFF"/>
+                </a:solidFill>
+              </a:rPr>
+              <a:t>R7 De-risk land-use decisions </a:t>
+            </a:r>
+            <a:r>
+              <a:rPr sz="1800">
+                <a:solidFill>
+                  <a:srgbClr val="CFDAE6"/>
+                </a:solidFill>
+              </a:rPr>
+              <a:t>— decide on criteria, with counsel</a:t>
+            </a:r>
+          </a:p>
+        </p:txBody>
+      </p:sp>
+    </p:spTree>
+  </p:cSld>
+  <p:clrMapOvr>
+    <a:masterClrMapping/>
+  </p:clrMapOvr>
+</p:sld>
+</file>
+
+<file path=ppt/slides/slide14.xml><?xml version="1.0" encoding="utf-8"?>
 <p:sld xmlns:a="http://schemas.openxmlformats.org/drawingml/2006/main" xmlns:p="http://schemas.openxmlformats.org/presentationml/2006/main" xmlns:r="http://schemas.openxmlformats.org/officeDocument/2006/relationships">
   <p:cSld>
     <p:spTree>
@@ -4324,7 +4877,7 @@
         <p:spPr>
           <a:xfrm>
             <a:off x="1554480" y="1371600"/>
-            <a:ext cx="9052560" cy="5057182"/>
+            <a:ext cx="9052560" cy="4787226"/>
           </a:xfrm>
           <a:prstGeom prst="rect">
             <a:avLst/>

--- a/docs/analyses/swanzey-financial-review/Deliverables/Board Presentation.pptx
+++ b/docs/analyses/swanzey-financial-review/Deliverables/Board Presentation.pptx
@@ -4605,7 +4605,7 @@
         <p:spPr>
           <a:xfrm>
             <a:off x="1280160" y="1280160"/>
-            <a:ext cx="9601200" cy="5289202"/>
+            <a:ext cx="9601200" cy="5282368"/>
           </a:xfrm>
           <a:prstGeom prst="rect">
             <a:avLst/>
@@ -4724,7 +4724,7 @@
         <p:spPr>
           <a:xfrm>
             <a:off x="1463040" y="1371600"/>
-            <a:ext cx="9235440" cy="4929950"/>
+            <a:ext cx="9235440" cy="4923377"/>
           </a:xfrm>
           <a:prstGeom prst="rect">
             <a:avLst/>
@@ -4760,7 +4760,7 @@
                   <a:srgbClr val="993C1D"/>
                 </a:solidFill>
               </a:rPr>
-              <a:t>2025 default is within $47K of the proposal — rejecting the budget changes almost nothing.</a:t>
+              <a:t>By 2026 the default is within $47K of the proposal — and exceeded it in 2017, 2018 &amp; 2023. Rejecting the budget changes almost nothing.</a:t>
             </a:r>
           </a:p>
         </p:txBody>
@@ -5571,7 +5571,7 @@
                   <a:srgbClr val="5F5E5A"/>
                 </a:solidFill>
               </a:rPr>
-              <a:t>base case crosses $10M by 2027–28, nears $12M by 2030</a:t>
+              <a:t>base case crosses $10M by 2028–29, nears $12M by 2031</a:t>
             </a:r>
           </a:p>
           <a:p>
